--- a/presentation/Proyecto1_Tomates.pptx
+++ b/presentation/Proyecto1_Tomates.pptx
@@ -249,25 +249,25 @@
                 <c:formatCode>General</c:formatCode>
                 <c:ptCount val="7"/>
                 <c:pt idx="0">
-                  <c:v>0.5277645779646873</c:v>
+                  <c:v>0.5277012308339918</c:v>
                 </c:pt>
                 <c:pt idx="1">
-                  <c:v>0.5105156284098754</c:v>
+                  <c:v>0.51019725556597</c:v>
                 </c:pt>
                 <c:pt idx="2">
-                  <c:v>0.5426017217604678</c:v>
+                  <c:v>0.5427163661320172</c:v>
                 </c:pt>
                 <c:pt idx="3">
-                  <c:v>0.5570085820517545</c:v>
+                  <c:v>0.5568848920213402</c:v>
                 </c:pt>
                 <c:pt idx="4">
-                  <c:v>0.5677275250002304</c:v>
+                  <c:v>0.5676844396977603</c:v>
                 </c:pt>
                 <c:pt idx="5">
-                  <c:v>0.5376212372636443</c:v>
+                  <c:v>0.5377933922447777</c:v>
                 </c:pt>
                 <c:pt idx="6">
-                  <c:v>0.5525023463606296</c:v>
+                  <c:v>0.5524563050721214</c:v>
                 </c:pt>
               </c:numCache>
             </c:numRef>
@@ -356,25 +356,25 @@
                 <c:formatCode>General</c:formatCode>
                 <c:ptCount val="7"/>
                 <c:pt idx="0">
-                  <c:v>0.5709225341263743</c:v>
+                  <c:v>0.5707331357960522</c:v>
                 </c:pt>
                 <c:pt idx="1">
-                  <c:v>0.5356663911346665</c:v>
+                  <c:v>0.5349767808720537</c:v>
                 </c:pt>
                 <c:pt idx="2">
-                  <c:v>0.5822789115329926</c:v>
+                  <c:v>0.5825230938530724</c:v>
                 </c:pt>
                 <c:pt idx="3">
-                  <c:v>0.5927898939692721</c:v>
+                  <c:v>0.5927261600781217</c:v>
                 </c:pt>
                 <c:pt idx="4">
-                  <c:v>0.605901203908212</c:v>
+                  <c:v>0.605686422670475</c:v>
                 </c:pt>
                 <c:pt idx="5">
-                  <c:v>0.5770777019343302</c:v>
+                  <c:v>0.5769596310531095</c:v>
                 </c:pt>
                 <c:pt idx="6">
-                  <c:v>0.5889288481381244</c:v>
+                  <c:v>0.5889101509137061</c:v>
                 </c:pt>
               </c:numCache>
             </c:numRef>
@@ -463,25 +463,25 @@
                 <c:formatCode>General</c:formatCode>
                 <c:ptCount val="7"/>
                 <c:pt idx="0">
-                  <c:v>0.5412934352083901</c:v>
+                  <c:v>0.5412168084898479</c:v>
                 </c:pt>
                 <c:pt idx="1">
-                  <c:v>0.543802640655725</c:v>
+                  <c:v>0.5434376050691027</c:v>
                 </c:pt>
                 <c:pt idx="2">
-                  <c:v>0.5589592413525333</c:v>
+                  <c:v>0.5590122413634465</c:v>
                 </c:pt>
                 <c:pt idx="3">
-                  <c:v>0.5747974220291295</c:v>
+                  <c:v>0.5746673275222091</c:v>
                 </c:pt>
                 <c:pt idx="4">
-                  <c:v>0.5778364365753107</c:v>
+                  <c:v>0.5777419092725672</c:v>
                 </c:pt>
                 <c:pt idx="5">
-                  <c:v>0.5645409563078521</c:v>
+                  <c:v>0.5645177504004019</c:v>
                 </c:pt>
                 <c:pt idx="6">
-                  <c:v>0.5745212884602676</c:v>
+                  <c:v>0.5743877807279588</c:v>
                 </c:pt>
               </c:numCache>
             </c:numRef>
@@ -1308,7 +1308,7 @@
           <a:p>
             <a:r>
               <a:rPr lang="en-US" dirty="0"/>
-              <a:t>Mensaje: SFS confirma que H es la variable principal, pero su elección posterior es inestable con 36 imágenes.</a:t>
+              <a:t>Mensaje: SFS confirma que H es la variable principal, pero su elección posterior es inestable con 36 imágenes. Incluso diferencias de menos de un nivel de gris entre entornos cambiaron el subconjunto (H,B,S,R en una versión previa) sin cambiar el desempeño en test.</a:t>
             </a:r>
             <a:endParaRPr lang="en-US" dirty="0"/>
           </a:p>
@@ -1484,7 +1484,7 @@
           <a:p>
             <a:r>
               <a:rPr lang="en-US" dirty="0"/>
-              <a:t>Los tres umbrales quedan sobre ln θ = 0: con θ = 1 habría un falso positivo en validación. Es la sobreconfianza de Bayes ingenuo.</a:t>
+              <a:t>Los tres umbrales quedan sobre ln θ = 0. Con θ = 1 habría errores de validación en análisis (1 FP, 0 FN), SFS (1 FP, 0 FN); PCA sin errores. La validación es separable: Youden da J = 1 en un intervalo y se toma su punto medio.</a:t>
             </a:r>
             <a:endParaRPr lang="en-US" dirty="0"/>
           </a:p>
@@ -1660,7 +1660,7 @@
           <a:p>
             <a:r>
               <a:rPr lang="en-US" dirty="0"/>
-              <a:t>Mismas condiciones: mismas particiones, mismo umbral de Youden, mismas métricas. Cada partición elige también la combinación de canales y el post-procesado con su propio desarrollo. Las particiones comparten imágenes: miden estabilidad, no significancia.</a:t>
+              <a:t>Mismas condiciones: mismas particiones, mismo umbral de Youden, mismas métricas. Cada partición elige también la combinación de canales y el post-procesado con su propio desarrollo. Las particiones comparten imágenes (incluidas las del test principal): miden estabilidad, no significancia, y son 360 predicciones sobre 60 imágenes, no 360 casos nuevos.</a:t>
             </a:r>
             <a:endParaRPr lang="en-US" dirty="0"/>
           </a:p>
@@ -2452,7 +2452,7 @@
           <a:p>
             <a:r>
               <a:rPr lang="en-US" dirty="0"/>
-              <a:t>El oráculo elige el cluster con mayor Jaccard: es la cota superior con esos clusters. Los pesos del puntaje son heurísticos (limitación).</a:t>
+              <a:t>El oráculo elige el cluster con mayor Jaccard: es la cota superior con esos clusters. Los pesos del puntaje y el prior de área se fijaron a priori a mano, sin usar máscaras de test (limitación).</a:t>
             </a:r>
             <a:endParaRPr lang="en-US" dirty="0"/>
           </a:p>
@@ -3003,7 +3003,7 @@
       </p:grpSpPr>
       <p:pic>
         <p:nvPicPr>
-          <p:cNvPr id="2" name="Image 0" descr="C:\Users\Victor\Documents\IA\results\segmentation_examples.png">    </p:cNvPr>
+          <p:cNvPr id="2" name="Image 0" descr="/home/victor/Documents/Proyectos/ia/results/segmentation_examples.png">    </p:cNvPr>
           <p:cNvPicPr>
             <a:picLocks noChangeAspect="1"/>
           </p:cNvPicPr>
@@ -3175,7 +3175,7 @@
                 <a:ea typeface="Calibri" pitchFamily="34" charset="-122"/>
                 <a:cs typeface="Calibri" pitchFamily="34" charset="-120"/>
               </a:rPr>
-              <a:t>Alexa y Victor · INFO1185 Inteligencia Artificial · Septiembre 2026</a:t>
+              <a:t>Alexa Galeano y Victor Sepulveda · INFO1185 Inteligencia Artificial · Septiembre 2026</a:t>
             </a:r>
             <a:endParaRPr lang="en-US" sz="1200" dirty="0"/>
           </a:p>
@@ -4146,7 +4146,7 @@
       </p:graphicFrame>
       <p:pic>
         <p:nvPicPr>
-          <p:cNvPr id="6" name="Image 0" descr="C:\Users\Victor\Documents\IA\results\feature_distributions.png">    </p:cNvPr>
+          <p:cNvPr id="6" name="Image 0" descr="/home/victor/Documents/Proyectos/ia/results/feature_distributions.png">    </p:cNvPr>
           <p:cNvPicPr>
             <a:picLocks noChangeAspect="1"/>
           </p:cNvPicPr>
@@ -4160,8 +4160,8 @@
         </p:blipFill>
         <p:spPr>
           <a:xfrm>
-            <a:off x="4206240" y="1559641"/>
-            <a:ext cx="4572000" cy="2001358"/>
+            <a:off x="4206240" y="1560072"/>
+            <a:ext cx="4572000" cy="2000496"/>
           </a:xfrm>
           <a:prstGeom prst="rect">
             <a:avLst/>
@@ -4727,7 +4727,7 @@
                           <a:ea typeface="Calibri" pitchFamily="34" charset="-122"/>
                           <a:cs typeface="Calibri" pitchFamily="34" charset="-120"/>
                         </a:rPr>
-                        <a:t>-4.08</a:t>
+                        <a:t>-4.04</a:t>
                       </a:r>
                       <a:endParaRPr lang="en-US" sz="1050" dirty="0">
                         <a:latin typeface="Calibri" charset="0"/>
@@ -4989,7 +4989,7 @@
                           <a:ea typeface="Calibri" pitchFamily="34" charset="-122"/>
                           <a:cs typeface="Calibri" pitchFamily="34" charset="-120"/>
                         </a:rPr>
-                        <a:t>3.30</a:t>
+                        <a:t>3.28</a:t>
                       </a:r>
                       <a:endParaRPr lang="en-US" sz="1050" dirty="0">
                         <a:latin typeface="Calibri" charset="0"/>
@@ -5251,7 +5251,7 @@
                           <a:ea typeface="Calibri" pitchFamily="34" charset="-122"/>
                           <a:cs typeface="Calibri" pitchFamily="34" charset="-120"/>
                         </a:rPr>
-                        <a:t>-1.74</a:t>
+                        <a:t>-1.75</a:t>
                       </a:r>
                       <a:endParaRPr lang="en-US" sz="1050" dirty="0">
                         <a:latin typeface="Calibri" charset="0"/>
@@ -5316,7 +5316,7 @@
                           <a:ea typeface="Calibri" pitchFamily="34" charset="-122"/>
                           <a:cs typeface="Calibri" pitchFamily="34" charset="-120"/>
                         </a:rPr>
-                        <a:t>0.882</a:t>
+                        <a:t>0.885</a:t>
                       </a:r>
                       <a:endParaRPr lang="en-US" sz="1050" dirty="0">
                         <a:latin typeface="Calibri" charset="0"/>
@@ -5513,7 +5513,7 @@
                           <a:ea typeface="Calibri" pitchFamily="34" charset="-122"/>
                           <a:cs typeface="Calibri" pitchFamily="34" charset="-120"/>
                         </a:rPr>
-                        <a:t>1.66</a:t>
+                        <a:t>1.65</a:t>
                       </a:r>
                       <a:endParaRPr lang="en-US" sz="1050" dirty="0">
                         <a:latin typeface="Calibri" charset="0"/>
@@ -5578,7 +5578,7 @@
                           <a:ea typeface="Calibri" pitchFamily="34" charset="-122"/>
                           <a:cs typeface="Calibri" pitchFamily="34" charset="-120"/>
                         </a:rPr>
-                        <a:t>0.895</a:t>
+                        <a:t>0.889</a:t>
                       </a:r>
                       <a:endParaRPr lang="en-US" sz="1050" dirty="0">
                         <a:latin typeface="Calibri" charset="0"/>
@@ -5775,7 +5775,7 @@
                           <a:ea typeface="Calibri" pitchFamily="34" charset="-122"/>
                           <a:cs typeface="Calibri" pitchFamily="34" charset="-120"/>
                         </a:rPr>
-                        <a:t>0.81</a:t>
+                        <a:t>0.80</a:t>
                       </a:r>
                       <a:endParaRPr lang="en-US" sz="1050" dirty="0">
                         <a:latin typeface="Calibri" charset="0"/>
@@ -6037,7 +6037,7 @@
                           <a:ea typeface="Calibri" pitchFamily="34" charset="-122"/>
                           <a:cs typeface="Calibri" pitchFamily="34" charset="-120"/>
                         </a:rPr>
-                        <a:t>0.66</a:t>
+                        <a:t>0.67</a:t>
                       </a:r>
                       <a:endParaRPr lang="en-US" sz="1050" dirty="0">
                         <a:latin typeface="Calibri" charset="0"/>
@@ -6299,7 +6299,7 @@
                           <a:ea typeface="Calibri" pitchFamily="34" charset="-122"/>
                           <a:cs typeface="Calibri" pitchFamily="34" charset="-120"/>
                         </a:rPr>
-                        <a:t>-0.37</a:t>
+                        <a:t>-0.36</a:t>
                       </a:r>
                       <a:endParaRPr lang="en-US" sz="1050" dirty="0">
                         <a:latin typeface="Calibri" charset="0"/>
@@ -6364,7 +6364,7 @@
                           <a:ea typeface="Calibri" pitchFamily="34" charset="-122"/>
                           <a:cs typeface="Calibri" pitchFamily="34" charset="-120"/>
                         </a:rPr>
-                        <a:t>0.619</a:t>
+                        <a:t>0.616</a:t>
                       </a:r>
                       <a:endParaRPr lang="en-US" sz="1050" dirty="0">
                         <a:latin typeface="Calibri" charset="0"/>
@@ -6561,7 +6561,7 @@
                           <a:ea typeface="Calibri" pitchFamily="34" charset="-122"/>
                           <a:cs typeface="Calibri" pitchFamily="34" charset="-120"/>
                         </a:rPr>
-                        <a:t>-0.34</a:t>
+                        <a:t>-0.35</a:t>
                       </a:r>
                       <a:endParaRPr lang="en-US" sz="1050" dirty="0">
                         <a:latin typeface="Calibri" charset="0"/>
@@ -6626,7 +6626,7 @@
                           <a:ea typeface="Calibri" pitchFamily="34" charset="-122"/>
                           <a:cs typeface="Calibri" pitchFamily="34" charset="-120"/>
                         </a:rPr>
-                        <a:t>0.635</a:t>
+                        <a:t>0.641</a:t>
                       </a:r>
                       <a:endParaRPr lang="en-US" sz="1050" dirty="0">
                         <a:latin typeface="Calibri" charset="0"/>
@@ -6824,7 +6824,7 @@
       </p:sp>
       <p:pic>
         <p:nvPicPr>
-          <p:cNvPr id="8" name="Image 0" descr="C:\Users\Victor\Documents\IA\results\feature_correlation.png">    </p:cNvPr>
+          <p:cNvPr id="8" name="Image 0" descr="/home/victor/Documents/Proyectos/ia/results/feature_correlation.png">    </p:cNvPr>
           <p:cNvPicPr>
             <a:picLocks noChangeAspect="1"/>
           </p:cNvPicPr>
@@ -6983,7 +6983,7 @@
       </p:sp>
       <p:pic>
         <p:nvPicPr>
-          <p:cNvPr id="5" name="Image 0" descr="C:\Users\Victor\Documents\IA\results\sfs_trace.png">    </p:cNvPr>
+          <p:cNvPr id="5" name="Image 0" descr="/home/victor/Documents/Proyectos/ia/results/sfs_trace.png">    </p:cNvPr>
           <p:cNvPicPr>
             <a:picLocks noChangeAspect="1"/>
           </p:cNvPicPr>
@@ -7143,7 +7143,7 @@
                 <a:ea typeface="Calibri" pitchFamily="34" charset="-122"/>
                 <a:cs typeface="Calibri" pitchFamily="34" charset="-120"/>
               </a:rPr>
-              <a:t>SFS: H, B, S, R</a:t>
+              <a:t>SFS: H, S, V</a:t>
             </a:r>
             <a:endParaRPr lang="en-US" sz="1250" dirty="0"/>
           </a:p>
@@ -7265,7 +7265,7 @@
                 <a:ea typeface="Calibri" pitchFamily="34" charset="-122"/>
                 <a:cs typeface="Calibri" pitchFamily="34" charset="-120"/>
               </a:rPr>
-              <a:t>Sí en H (primera elegida) y R. SFS cambia G por B y S: optimiza el AUC conjunto, no la separación individual, y el criterio está saturado (AUC ≈ 0.98, DE ≈ 0.04). En 30 particiones SFS eligió 14 subconjuntos distintos; la regla de análisis repitió el suyo en 16.</a:t>
+              <a:t>Solo en H (primera elegida). SFS cambia G y R por S y V: optimiza el AUC conjunto, no la separación individual, y el criterio está saturado (AUC ≈ 0.98, DE ≈ 0.04). En 30 particiones: SFS 11 conjuntos distintos; análisis 6.</a:t>
             </a:r>
             <a:endParaRPr lang="en-US" sz="1100" dirty="0"/>
           </a:p>
@@ -7635,7 +7635,7 @@
       </p:sp>
       <p:pic>
         <p:nvPicPr>
-          <p:cNvPr id="11" name="Image 0" descr="C:\Users\Victor\Documents\IA\results\threshold_sweep.png">    </p:cNvPr>
+          <p:cNvPr id="11" name="Image 0" descr="/home/victor/Documents/Proyectos/ia/results/threshold_sweep.png">    </p:cNvPr>
           <p:cNvPicPr>
             <a:picLocks noChangeAspect="1"/>
           </p:cNvPicPr>
@@ -8518,7 +8518,7 @@
                           <a:ea typeface="Calibri" pitchFamily="34" charset="-122"/>
                           <a:cs typeface="Calibri" pitchFamily="34" charset="-120"/>
                         </a:rPr>
-                        <a:t>7.47</a:t>
+                        <a:t>7.46</a:t>
                       </a:r>
                       <a:endParaRPr lang="en-US" sz="1050" dirty="0">
                         <a:latin typeface="Calibri" charset="0"/>
@@ -8975,7 +8975,7 @@
                           <a:ea typeface="Calibri" pitchFamily="34" charset="-122"/>
                           <a:cs typeface="Calibri" pitchFamily="34" charset="-120"/>
                         </a:rPr>
-                        <a:t>H, B, S, R</a:t>
+                        <a:t>H, S, V</a:t>
                       </a:r>
                       <a:endParaRPr lang="en-US" sz="1050" dirty="0">
                         <a:latin typeface="Calibri" charset="0"/>
@@ -9040,7 +9040,7 @@
                           <a:ea typeface="Calibri" pitchFamily="34" charset="-122"/>
                           <a:cs typeface="Calibri" pitchFamily="34" charset="-120"/>
                         </a:rPr>
-                        <a:t>7.30</a:t>
+                        <a:t>4.50</a:t>
                       </a:r>
                       <a:endParaRPr lang="en-US" sz="1050" dirty="0">
                         <a:latin typeface="Calibri" charset="0"/>
@@ -9562,7 +9562,7 @@
                           <a:ea typeface="Calibri" pitchFamily="34" charset="-122"/>
                           <a:cs typeface="Calibri" pitchFamily="34" charset="-120"/>
                         </a:rPr>
-                        <a:t>1.76</a:t>
+                        <a:t>1.79</a:t>
                       </a:r>
                       <a:endParaRPr lang="en-US" sz="1050" dirty="0">
                         <a:latin typeface="Calibri" charset="0"/>
@@ -10086,7 +10086,7 @@
       </p:sp>
       <p:pic>
         <p:nvPicPr>
-          <p:cNvPr id="10" name="Image 0" descr="C:\Users\Victor\Documents\IA\results\roc_curves.png">    </p:cNvPr>
+          <p:cNvPr id="10" name="Image 0" descr="/home/victor/Documents/Proyectos/ia/results/roc_curves.png">    </p:cNvPr>
           <p:cNvPicPr>
             <a:picLocks noChangeAspect="1"/>
           </p:cNvPicPr>
@@ -10245,7 +10245,7 @@
       </p:sp>
       <p:pic>
         <p:nvPicPr>
-          <p:cNvPr id="5" name="Image 0" descr="C:\Users\Victor\Documents\IA\results\pca_variance.png">    </p:cNvPr>
+          <p:cNvPr id="5" name="Image 0" descr="/home/victor/Documents/Proyectos/ia/results/pca_variance.png">    </p:cNvPr>
           <p:cNvPicPr>
             <a:picLocks noChangeAspect="1"/>
           </p:cNvPicPr>
@@ -10259,8 +10259,8 @@
         </p:blipFill>
         <p:spPr>
           <a:xfrm>
-            <a:off x="365760" y="963111"/>
-            <a:ext cx="4846320" cy="2554339"/>
+            <a:off x="365760" y="964070"/>
+            <a:ext cx="4846320" cy="2552419"/>
           </a:xfrm>
           <a:prstGeom prst="rect">
             <a:avLst/>
@@ -10269,7 +10269,7 @@
       </p:pic>
       <p:pic>
         <p:nvPicPr>
-          <p:cNvPr id="6" name="Image 1" descr="C:\Users\Victor\Documents\IA\results\pca_loadings.png">    </p:cNvPr>
+          <p:cNvPr id="6" name="Image 1" descr="/home/victor/Documents/Proyectos/ia/results/pca_loadings.png">    </p:cNvPr>
           <p:cNvPicPr>
             <a:picLocks noChangeAspect="1"/>
           </p:cNvPicPr>
@@ -10283,8 +10283,8 @@
         </p:blipFill>
         <p:spPr>
           <a:xfrm>
-            <a:off x="1164210" y="3611880"/>
-            <a:ext cx="3249419" cy="1371600"/>
+            <a:off x="1162796" y="3611880"/>
+            <a:ext cx="3252247" cy="1371600"/>
           </a:xfrm>
           <a:prstGeom prst="rect">
             <a:avLst/>
@@ -10676,7 +10676,7 @@
                           <a:ea typeface="Calibri" pitchFamily="34" charset="-122"/>
                           <a:cs typeface="Calibri" pitchFamily="34" charset="-120"/>
                         </a:rPr>
-                        <a:t>3.73</a:t>
+                        <a:t>3.71</a:t>
                       </a:r>
                       <a:endParaRPr lang="en-US" sz="1050" dirty="0">
                         <a:latin typeface="Calibri" charset="0"/>
@@ -10741,7 +10741,7 @@
                           <a:ea typeface="Calibri" pitchFamily="34" charset="-122"/>
                           <a:cs typeface="Calibri" pitchFamily="34" charset="-120"/>
                         </a:rPr>
-                        <a:t>45.4</a:t>
+                        <a:t>45.1</a:t>
                       </a:r>
                       <a:endParaRPr lang="en-US" sz="1050" dirty="0">
                         <a:latin typeface="Calibri" charset="0"/>
@@ -10806,7 +10806,7 @@
                           <a:ea typeface="Calibri" pitchFamily="34" charset="-122"/>
                           <a:cs typeface="Calibri" pitchFamily="34" charset="-120"/>
                         </a:rPr>
-                        <a:t>45.4</a:t>
+                        <a:t>45.1</a:t>
                       </a:r>
                       <a:endParaRPr lang="en-US" sz="1050" dirty="0">
                         <a:latin typeface="Calibri" charset="0"/>
@@ -10938,7 +10938,7 @@
                           <a:ea typeface="Calibri" pitchFamily="34" charset="-122"/>
                           <a:cs typeface="Calibri" pitchFamily="34" charset="-120"/>
                         </a:rPr>
-                        <a:t>2.78</a:t>
+                        <a:t>2.80</a:t>
                       </a:r>
                       <a:endParaRPr lang="en-US" sz="1050" dirty="0">
                         <a:latin typeface="Calibri" charset="0"/>
@@ -11003,7 +11003,7 @@
                           <a:ea typeface="Calibri" pitchFamily="34" charset="-122"/>
                           <a:cs typeface="Calibri" pitchFamily="34" charset="-120"/>
                         </a:rPr>
-                        <a:t>33.7</a:t>
+                        <a:t>34.0</a:t>
                       </a:r>
                       <a:endParaRPr lang="en-US" sz="1050" dirty="0">
                         <a:latin typeface="Calibri" charset="0"/>
@@ -11068,7 +11068,7 @@
                           <a:ea typeface="Calibri" pitchFamily="34" charset="-122"/>
                           <a:cs typeface="Calibri" pitchFamily="34" charset="-120"/>
                         </a:rPr>
-                        <a:t>79.1</a:t>
+                        <a:t>79.2</a:t>
                       </a:r>
                       <a:endParaRPr lang="en-US" sz="1050" dirty="0">
                         <a:latin typeface="Calibri" charset="0"/>
@@ -12006,7 +12006,7 @@
                 <a:ea typeface="Calibri" pitchFamily="34" charset="-122"/>
                 <a:cs typeface="Calibri" pitchFamily="34" charset="-120"/>
               </a:rPr>
-              <a:t>Menor p con ≥ 95 % de varianza; coincide con el codo y con Kaiser (λ₄ ≪ 1). PCA en entrenamiento sobre 8 variables estandarizadas; Bayes sobre PC1–PC3.</a:t>
+              <a:t>Menor p con ≥ 95 % de varianza; coincide con el codo y con Kaiser (λ₄ ≪ 1). PCA en entrenamiento sobre 8 variables estandarizadas. Decorrelaciona globalmente, pero no garantiza independencia dentro de cada clase.</a:t>
             </a:r>
             <a:endParaRPr lang="en-US" sz="1150" dirty="0"/>
           </a:p>
@@ -12149,7 +12149,7 @@
       </p:sp>
       <p:pic>
         <p:nvPicPr>
-          <p:cNvPr id="5" name="Image 0" descr="C:\Users\Victor\Documents\IA\results\repeated_splits.png">    </p:cNvPr>
+          <p:cNvPr id="5" name="Image 0" descr="/home/victor/Documents/Proyectos/ia/results/repeated_splits.png">    </p:cNvPr>
           <p:cNvPicPr>
             <a:picLocks noChangeAspect="1"/>
           </p:cNvPicPr>
@@ -12204,7 +12204,7 @@
                 <a:ea typeface="Cambria" pitchFamily="34" charset="-122"/>
                 <a:cs typeface="Cambria" pitchFamily="34" charset="-120"/>
               </a:rPr>
-              <a:t>0.975</a:t>
+              <a:t>0.969</a:t>
             </a:r>
             <a:endParaRPr lang="en-US" sz="3000" dirty="0"/>
           </a:p>
@@ -12243,7 +12243,7 @@
                 <a:ea typeface="Calibri" pitchFamily="34" charset="-122"/>
                 <a:cs typeface="Calibri" pitchFamily="34" charset="-120"/>
               </a:rPr>
-              <a:t>Bayes + SFS (9 errores)</a:t>
+              <a:t>Bayes + SFS (11 errores)</a:t>
             </a:r>
             <a:endParaRPr lang="en-US" sz="1100" dirty="0"/>
           </a:p>
@@ -12282,7 +12282,7 @@
                 <a:ea typeface="Cambria" pitchFamily="34" charset="-122"/>
                 <a:cs typeface="Cambria" pitchFamily="34" charset="-120"/>
               </a:rPr>
-              <a:t>0.972</a:t>
+              <a:t>0.967</a:t>
             </a:r>
             <a:endParaRPr lang="en-US" sz="3000" dirty="0"/>
           </a:p>
@@ -12321,7 +12321,7 @@
                 <a:ea typeface="Calibri" pitchFamily="34" charset="-122"/>
                 <a:cs typeface="Calibri" pitchFamily="34" charset="-120"/>
               </a:rPr>
-              <a:t>Bayes + análisis (10 errores)</a:t>
+              <a:t>Bayes + análisis (12 errores)</a:t>
             </a:r>
             <a:endParaRPr lang="en-US" sz="1100" dirty="0"/>
           </a:p>
@@ -12360,7 +12360,7 @@
                 <a:ea typeface="Cambria" pitchFamily="34" charset="-122"/>
                 <a:cs typeface="Cambria" pitchFamily="34" charset="-120"/>
               </a:rPr>
-              <a:t>0.950</a:t>
+              <a:t>0.964</a:t>
             </a:r>
             <a:endParaRPr lang="en-US" sz="3000" dirty="0"/>
           </a:p>
@@ -12399,7 +12399,7 @@
                 <a:ea typeface="Calibri" pitchFamily="34" charset="-122"/>
                 <a:cs typeface="Calibri" pitchFamily="34" charset="-120"/>
               </a:rPr>
-              <a:t>PCA + Bayes (18 errores)</a:t>
+              <a:t>PCA + Bayes (13 errores)</a:t>
             </a:r>
             <a:endParaRPr lang="en-US" sz="1100" dirty="0"/>
           </a:p>
@@ -12502,7 +12502,7 @@
                 <a:ea typeface="Calibri" pitchFamily="34" charset="-122"/>
                 <a:cs typeface="Calibri" pitchFamily="34" charset="-120"/>
               </a:rPr>
-              <a:t>SFS ≈ análisis: diferencia de pocos errores, dentro de la variabilidad.</a:t>
+              <a:t>Las tres difieren en pocos errores, dentro de la variabilidad: no se pueden ordenar.</a:t>
             </a:r>
             <a:endParaRPr lang="en-US" sz="1100" dirty="0"/>
           </a:p>
@@ -12523,7 +12523,7 @@
                 <a:ea typeface="Calibri" pitchFamily="34" charset="-122"/>
                 <a:cs typeface="Calibri" pitchFamily="34" charset="-120"/>
               </a:rPr>
-              <a:t>PCA es consistentemente la peor: no usa la etiqueta y reintroduce B, V y b*.</a:t>
+              <a:t>PCA vs análisis (gana/empata/pierde): 4/22/4. Estudio exploratorio, no usado para elegir.</a:t>
             </a:r>
             <a:endParaRPr lang="en-US" sz="1100" dirty="0"/>
           </a:p>
@@ -12565,7 +12565,7 @@
                 <a:ea typeface="Calibri" pitchFamily="34" charset="-122"/>
                 <a:cs typeface="Calibri" pitchFamily="34" charset="-120"/>
               </a:rPr>
-              <a:t>Si se rehace la selección con máscaras ideales, SFS comete 12 errores: sobreajusta la selección.</a:t>
+              <a:t>Si se rehace la selección con máscaras ideales, SFS comete 11 errores: posible sobreajuste de la selección.</a:t>
             </a:r>
             <a:endParaRPr lang="en-US" sz="1100" dirty="0"/>
           </a:p>
@@ -12708,7 +12708,7 @@
       </p:sp>
       <p:pic>
         <p:nvPicPr>
-          <p:cNvPr id="5" name="Image 0" descr="C:\Users\Victor\Documents\IA\results\integration.png">    </p:cNvPr>
+          <p:cNvPr id="5" name="Image 0" descr="/home/victor/Documents/Proyectos/ia/results/integration.png">    </p:cNvPr>
           <p:cNvPicPr>
             <a:picLocks noChangeAspect="1"/>
           </p:cNvPicPr>
@@ -13115,7 +13115,7 @@
                           <a:ea typeface="Calibri" pitchFamily="34" charset="-122"/>
                           <a:cs typeface="Calibri" pitchFamily="34" charset="-120"/>
                         </a:rPr>
-                        <a:t>10</a:t>
+                        <a:t>12</a:t>
                       </a:r>
                       <a:endParaRPr lang="en-US" sz="1050" dirty="0">
                         <a:latin typeface="Calibri" charset="0"/>
@@ -13180,7 +13180,7 @@
                           <a:ea typeface="Calibri" pitchFamily="34" charset="-122"/>
                           <a:cs typeface="Calibri" pitchFamily="34" charset="-120"/>
                         </a:rPr>
-                        <a:t>9</a:t>
+                        <a:t>11</a:t>
                       </a:r>
                       <a:endParaRPr lang="en-US" sz="1050" dirty="0">
                         <a:latin typeface="Calibri" charset="0"/>
@@ -13245,7 +13245,7 @@
                           <a:ea typeface="Calibri" pitchFamily="34" charset="-122"/>
                           <a:cs typeface="Calibri" pitchFamily="34" charset="-120"/>
                         </a:rPr>
-                        <a:t>18</a:t>
+                        <a:t>13</a:t>
                       </a:r>
                       <a:endParaRPr lang="en-US" sz="1050" dirty="0">
                         <a:latin typeface="Calibri" charset="0"/>
@@ -13442,7 +13442,7 @@
                           <a:ea typeface="Calibri" pitchFamily="34" charset="-122"/>
                           <a:cs typeface="Calibri" pitchFamily="34" charset="-120"/>
                         </a:rPr>
-                        <a:t>1</a:t>
+                        <a:t>2</a:t>
                       </a:r>
                       <a:endParaRPr lang="en-US" sz="1050" dirty="0">
                         <a:latin typeface="Calibri" charset="0"/>
@@ -13507,7 +13507,7 @@
                           <a:ea typeface="Calibri" pitchFamily="34" charset="-122"/>
                           <a:cs typeface="Calibri" pitchFamily="34" charset="-120"/>
                         </a:rPr>
-                        <a:t>7</a:t>
+                        <a:t>8</a:t>
                       </a:r>
                       <a:endParaRPr lang="en-US" sz="1050" dirty="0">
                         <a:latin typeface="Calibri" charset="0"/>
@@ -13966,7 +13966,7 @@
                           <a:ea typeface="Calibri" pitchFamily="34" charset="-122"/>
                           <a:cs typeface="Calibri" pitchFamily="34" charset="-120"/>
                         </a:rPr>
-                        <a:t>12</a:t>
+                        <a:t>11</a:t>
                       </a:r>
                       <a:endParaRPr lang="en-US" sz="1050" dirty="0">
                         <a:latin typeface="Calibri" charset="0"/>
@@ -14163,7 +14163,7 @@
                           <a:ea typeface="Calibri" pitchFamily="34" charset="-122"/>
                           <a:cs typeface="Calibri" pitchFamily="34" charset="-120"/>
                         </a:rPr>
-                        <a:t>10</a:t>
+                        <a:t>15</a:t>
                       </a:r>
                       <a:endParaRPr lang="en-US" sz="1050" dirty="0">
                         <a:latin typeface="Calibri" charset="0"/>
@@ -14228,7 +14228,7 @@
                           <a:ea typeface="Calibri" pitchFamily="34" charset="-122"/>
                           <a:cs typeface="Calibri" pitchFamily="34" charset="-120"/>
                         </a:rPr>
-                        <a:t>15</a:t>
+                        <a:t>13</a:t>
                       </a:r>
                       <a:endParaRPr lang="en-US" sz="1050" dirty="0">
                         <a:latin typeface="Calibri" charset="0"/>
@@ -14418,7 +14418,7 @@
                 <a:ea typeface="Cambria" pitchFamily="34" charset="-122"/>
                 <a:cs typeface="Cambria" pitchFamily="34" charset="-120"/>
               </a:rPr>
-              <a:t>ρ = -0.88</a:t>
+              <a:t>ρ = -0.89</a:t>
             </a:r>
             <a:endParaRPr lang="en-US" sz="3000" dirty="0"/>
           </a:p>
@@ -14521,7 +14521,7 @@
                 <a:ea typeface="Calibri" pitchFamily="34" charset="-122"/>
                 <a:cs typeface="Calibri" pitchFamily="34" charset="-120"/>
               </a:rPr>
-              <a:t>Solo cambiar la máscara del test (mismo modelo y umbral) corrige casi todos los errores.</a:t>
+              <a:t>4/12 imágenes de test con J &lt; 0.2 se clasifican bien: el fondo tiene color compatible con la clase.</a:t>
             </a:r>
             <a:endParaRPr lang="en-US" sz="1100" dirty="0"/>
           </a:p>
@@ -14542,7 +14542,7 @@
                 <a:ea typeface="Calibri" pitchFamily="34" charset="-122"/>
                 <a:cs typeface="Calibri" pitchFamily="34" charset="-120"/>
               </a:rPr>
-              <a:t>Con la selección fija y máscara ideal: 0 errores. La segmentación es la causa dominante.</a:t>
+              <a:t>Con la selección fija y máscara ideal: 0 errores. La segmentación es la principal fuente de errores.</a:t>
             </a:r>
             <a:endParaRPr lang="en-US" sz="1100" dirty="0"/>
           </a:p>
@@ -15118,7 +15118,7 @@
                 <a:ea typeface="Calibri" pitchFamily="34" charset="-122"/>
                 <a:cs typeface="Calibri" pitchFamily="34" charset="-120"/>
               </a:rPr>
-              <a:t>H, B, S, R. Coincide en H y R con el análisis.</a:t>
+              <a:t>H, S, V. Coincide solo en H con el análisis.</a:t>
             </a:r>
             <a:endParaRPr lang="en-US" sz="1100" dirty="0"/>
           </a:p>
@@ -15223,7 +15223,7 @@
                 <a:ea typeface="Calibri" pitchFamily="34" charset="-122"/>
                 <a:cs typeface="Calibri" pitchFamily="34" charset="-120"/>
               </a:rPr>
-              <a:t>SFS ≈ análisis; análisis es más estable e interpretable.</a:t>
+              <a:t>Equivalentes dentro de la variabilidad; análisis es menos inestable e interpretable.</a:t>
             </a:r>
             <a:endParaRPr lang="en-US" sz="1100" dirty="0"/>
           </a:p>
@@ -15538,7 +15538,7 @@
                 <a:ea typeface="Calibri" pitchFamily="34" charset="-122"/>
                 <a:cs typeface="Calibri" pitchFamily="34" charset="-120"/>
               </a:rPr>
-              <a:t>No: empata en el test principal y es la peor al repetir.</a:t>
+              <a:t>No: empata en el test principal y al repetir (0.964 de exactitud media).</a:t>
             </a:r>
             <a:endParaRPr lang="en-US" sz="1100" dirty="0"/>
           </a:p>
@@ -15643,7 +15643,7 @@
                 <a:ea typeface="Calibri" pitchFamily="34" charset="-122"/>
                 <a:cs typeface="Calibri" pitchFamily="34" charset="-120"/>
               </a:rPr>
-              <a:t>Causa dominante: con selección fija y máscara ideal, errores 10/9/18 → 0.</a:t>
+              <a:t>Principal fuente de errores: con máscara ideal 12/11/13 → 0. Pero el fondo correlaciona con la clase.</a:t>
             </a:r>
             <a:endParaRPr lang="en-US" sz="1100" dirty="0"/>
           </a:p>
@@ -16029,7 +16029,7 @@
                 <a:ea typeface="Calibri" pitchFamily="34" charset="-122"/>
                 <a:cs typeface="Calibri" pitchFamily="34" charset="-120"/>
               </a:rPr>
-              <a:t>Análisis ≈ SFS en desempeño; el análisis es más estable. PCA no aporta.</a:t>
+              <a:t>Análisis, SFS y PCA equivalentes en este experimento; el análisis es menos inestable. PCA no mejora.</a:t>
             </a:r>
             <a:endParaRPr lang="en-US" sz="1300" dirty="0"/>
           </a:p>
@@ -16134,7 +16134,7 @@
                 <a:ea typeface="Calibri" pitchFamily="34" charset="-122"/>
                 <a:cs typeface="Calibri" pitchFamily="34" charset="-120"/>
               </a:rPr>
-              <a:t>60 imágenes y test de 12: techo de desempeño. Pesos heurísticos del cluster, sin textura ni forma.</a:t>
+              <a:t>60 imágenes y test de 12: techo de desempeño. El fondo correlaciona con la clase; sin textura ni forma.</a:t>
             </a:r>
             <a:endParaRPr lang="en-US" sz="1300" dirty="0"/>
           </a:p>
@@ -17679,7 +17679,7 @@
       </p:sp>
       <p:pic>
         <p:nvPicPr>
-          <p:cNvPr id="13" name="Image 0" descr="C:\Users\Victor\Documents\IA\results\dataset_montage.png">    </p:cNvPr>
+          <p:cNvPr id="13" name="Image 0" descr="/home/victor/Documents/Proyectos/ia/results/dataset_montage.png">    </p:cNvPr>
           <p:cNvPicPr>
             <a:picLocks noChangeAspect="1"/>
           </p:cNvPicPr>
@@ -19050,7 +19050,7 @@
       </p:sp>
       <p:pic>
         <p:nvPicPr>
-          <p:cNvPr id="5" name="Image 0" descr="C:\Users\Victor\Documents\IA\results\pixel_hist_fruit_background.png">    </p:cNvPr>
+          <p:cNvPr id="5" name="Image 0" descr="/home/victor/Documents/Proyectos/ia/results/pixel_hist_fruit_background.png">    </p:cNvPr>
           <p:cNvPicPr>
             <a:picLocks noChangeAspect="1"/>
           </p:cNvPicPr>
@@ -19064,8 +19064,8 @@
         </p:blipFill>
         <p:spPr>
           <a:xfrm>
-            <a:off x="475021" y="868680"/>
-            <a:ext cx="8193957" cy="3474720"/>
+            <a:off x="473249" y="868680"/>
+            <a:ext cx="8197503" cy="3474720"/>
           </a:xfrm>
           <a:prstGeom prst="rect">
             <a:avLst/>
@@ -19491,7 +19491,7 @@
       </p:sp>
       <p:pic>
         <p:nvPicPr>
-          <p:cNvPr id="5" name="Image 0" descr="C:\Users\Victor\Documents\IA\results\pixel_hist_ripe_unripe.png">    </p:cNvPr>
+          <p:cNvPr id="5" name="Image 0" descr="/home/victor/Documents/Proyectos/ia/results/pixel_hist_ripe_unripe.png">    </p:cNvPr>
           <p:cNvPicPr>
             <a:picLocks noChangeAspect="1"/>
           </p:cNvPicPr>
@@ -19505,8 +19505,8 @@
         </p:blipFill>
         <p:spPr>
           <a:xfrm>
-            <a:off x="475021" y="868680"/>
-            <a:ext cx="8193957" cy="3474720"/>
+            <a:off x="473249" y="868680"/>
+            <a:ext cx="8197503" cy="3474720"/>
           </a:xfrm>
           <a:prstGeom prst="rect">
             <a:avLst/>
@@ -20209,7 +20209,7 @@
                           <a:ea typeface="Calibri" pitchFamily="34" charset="-122"/>
                           <a:cs typeface="Calibri" pitchFamily="34" charset="-120"/>
                         </a:rPr>
-                        <a:t>Δ centroides &lt; 1e-4 o 300 iteraciones (máx. observado: 47)</a:t>
+                        <a:t>Δ centroides &lt; 1e-4 o 300 iteraciones (máx. observado: 28)</a:t>
                       </a:r>
                       <a:endParaRPr lang="en-US" sz="1050" dirty="0">
                         <a:latin typeface="Calibri" charset="0"/>
@@ -21045,7 +21045,7 @@
                           <a:ea typeface="Calibri" pitchFamily="34" charset="-122"/>
                           <a:cs typeface="Calibri" pitchFamily="34" charset="-120"/>
                         </a:rPr>
-                        <a:t>0.497</a:t>
+                        <a:t>0.504</a:t>
                       </a:r>
                       <a:endParaRPr lang="en-US" sz="1050" dirty="0">
                         <a:latin typeface="Calibri" charset="0"/>
@@ -21307,7 +21307,7 @@
                           <a:ea typeface="Calibri" pitchFamily="34" charset="-122"/>
                           <a:cs typeface="Calibri" pitchFamily="34" charset="-120"/>
                         </a:rPr>
-                        <a:t>0.511</a:t>
+                        <a:t>0.510</a:t>
                       </a:r>
                       <a:endParaRPr lang="en-US" sz="1050" dirty="0">
                         <a:latin typeface="Calibri" charset="0"/>
@@ -21372,7 +21372,7 @@
                           <a:ea typeface="Calibri" pitchFamily="34" charset="-122"/>
                           <a:cs typeface="Calibri" pitchFamily="34" charset="-120"/>
                         </a:rPr>
-                        <a:t>0.473</a:t>
+                        <a:t>0.470</a:t>
                       </a:r>
                       <a:endParaRPr lang="en-US" sz="1050" dirty="0">
                         <a:latin typeface="Calibri" charset="0"/>
@@ -21437,7 +21437,7 @@
                           <a:ea typeface="Calibri" pitchFamily="34" charset="-122"/>
                           <a:cs typeface="Calibri" pitchFamily="34" charset="-120"/>
                         </a:rPr>
-                        <a:t>0.478</a:t>
+                        <a:t>0.477</a:t>
                       </a:r>
                       <a:endParaRPr lang="en-US" sz="1050" dirty="0">
                         <a:latin typeface="Calibri" charset="0"/>
@@ -21502,7 +21502,7 @@
                           <a:ea typeface="Calibri" pitchFamily="34" charset="-122"/>
                           <a:cs typeface="Calibri" pitchFamily="34" charset="-120"/>
                         </a:rPr>
-                        <a:t>0.544</a:t>
+                        <a:t>0.543</a:t>
                       </a:r>
                       <a:endParaRPr lang="en-US" sz="1050" dirty="0">
                         <a:latin typeface="Calibri" charset="0"/>
@@ -22091,7 +22091,7 @@
                           <a:ea typeface="Calibri" pitchFamily="34" charset="-122"/>
                           <a:cs typeface="Calibri" pitchFamily="34" charset="-120"/>
                         </a:rPr>
-                        <a:t>0.477</a:t>
+                        <a:t>0.471</a:t>
                       </a:r>
                       <a:endParaRPr lang="en-US" sz="1050" dirty="0">
                         <a:latin typeface="Calibri" charset="0"/>
@@ -22942,7 +22942,7 @@
                           <a:ea typeface="Calibri" pitchFamily="34" charset="-122"/>
                           <a:cs typeface="Calibri" pitchFamily="34" charset="-120"/>
                         </a:rPr>
-                        <a:t>0.553</a:t>
+                        <a:t>0.552</a:t>
                       </a:r>
                       <a:endParaRPr lang="en-US" sz="1050" dirty="0">
                         <a:latin typeface="Calibri" charset="0"/>
@@ -23137,7 +23137,7 @@
                           <a:ea typeface="Calibri" pitchFamily="34" charset="-122"/>
                           <a:cs typeface="Calibri" pitchFamily="34" charset="-120"/>
                         </a:rPr>
-                        <a:t>0.575</a:t>
+                        <a:t>0.574</a:t>
                       </a:r>
                       <a:endParaRPr lang="en-US" sz="1050" dirty="0">
                         <a:latin typeface="Calibri" charset="0"/>
@@ -23223,7 +23223,7 @@
                 <a:ea typeface="Calibri" pitchFamily="34" charset="-122"/>
                 <a:cs typeface="Calibri" pitchFamily="34" charset="-120"/>
               </a:rPr>
-              <a:t>Jaccard medio en desarrollo según la regla para elegir el cluster fruto. El puntaje de objeto es la mejor regla y queda cerca del oráculo: el límite es K-Means, no la regla.</a:t>
+              <a:t>Jaccard medio en desarrollo según la regla para elegir el cluster fruto. El puntaje de objeto gana en 6 de 7 combinaciones y queda cerca del oráculo: el límite es K-Means, no la regla.</a:t>
             </a:r>
             <a:endParaRPr lang="en-US" sz="1050" dirty="0"/>
           </a:p>
@@ -23608,7 +23608,7 @@
                 <a:ea typeface="Calibri" pitchFamily="34" charset="-122"/>
                 <a:cs typeface="Calibri" pitchFamily="34" charset="-120"/>
               </a:rPr>
-              <a:t>Diferencia mejor–peor (G): 0.057, frente a DE entre imágenes ≈ 0.28: ranking débil. R separa rojo de verde; B separa objetos saturados de fondos claros. Test: J = 0.460 (máscara final con post-proceso: 0.458).</a:t>
+              <a:t>Diferencia mejor–peor (G): 0.058, frente a DE entre imágenes ≈ 0.28: ranking débil. R separa rojo de verde; B separa objetos saturados de fondos claros. Test: J = 0.460 (máscara final con post-proceso: 0.457).</a:t>
             </a:r>
             <a:endParaRPr lang="en-US" sz="1100" dirty="0"/>
           </a:p>
@@ -23751,7 +23751,7 @@
       </p:sp>
       <p:pic>
         <p:nvPicPr>
-          <p:cNvPr id="5" name="Image 0" descr="C:\Users\Victor\Documents\IA\results\segmentation_examples.png">    </p:cNvPr>
+          <p:cNvPr id="5" name="Image 0" descr="/home/victor/Documents/Proyectos/ia/results/segmentation_examples.png">    </p:cNvPr>
           <p:cNvPicPr>
             <a:picLocks noChangeAspect="1"/>
           </p:cNvPicPr>
@@ -23977,7 +23977,7 @@
                 <a:ea typeface="Calibri" pitchFamily="34" charset="-122"/>
                 <a:cs typeface="Calibri" pitchFamily="34" charset="-120"/>
               </a:rPr>
-              <a:t>Apertura + cierre (elipse 5×5), relleno de huecos y eliminación de componentes &lt; 1 %. Mejora las 7 combinaciones.</a:t>
+              <a:t>Apertura + cierre (elipse 5×5), relleno de huecos y eliminación de componentes &lt; 1 %. Mejora la media de desarrollo en 7/7; en test 0.460 → 0.457.</a:t>
             </a:r>
             <a:endParaRPr lang="en-US" sz="1150" dirty="0"/>
           </a:p>
